--- a/reporting-site/public/programs/public-service-data-quality/public-service-data-quality-deck.pptx
+++ b/reporting-site/public/programs/public-service-data-quality/public-service-data-quality-deck.pptx
@@ -25,6 +25,9 @@
     <p:sldId id="273" r:id="rId19"/>
     <p:sldId id="274" r:id="rId20"/>
     <p:sldId id="275" r:id="rId21"/>
+    <p:sldId id="276" r:id="rId22"/>
+    <p:sldId id="277" r:id="rId23"/>
+    <p:sldId id="278" r:id="rId24"/>
   </p:sldIdLst>
   <p:sldSz cx="9144000" cy="5143500" type="screen16x9"/>
   <p:notesSz cx="6858000" cy="9144000"/>
@@ -3164,7 +3167,7 @@
             </a:pPr>
             <a:r>
               <a:rPr/>
-              <a:t>ADB DMC measurement-gap evidence — Philippines and Bangladesh pilots, AI-first under §18</a:t>
+              <a:t>Two ADB economies, two public maps, and a systematic gap planners should not ignore — AI-first under §18</a:t>
             </a:r>
             <a:br/>
             <a:br/>
@@ -3195,7 +3198,7 @@
             </a:pPr>
             <a:r>
               <a:rPr/>
-              <a:t>2026-05-07</a:t>
+              <a:t>2026-07-31</a:t>
             </a:r>
           </a:p>
         </p:txBody>
@@ -3232,26 +3235,51 @@
             <p:ph type="title"/>
           </p:nvPr>
         </p:nvSpPr>
-        <p:spPr>
+        <p:spPr/>
+        <p:txBody>
+          <a:bodyPr/>
+          <a:lstStyle/>
+          <a:p>
+            <a:pPr lvl="0" indent="0" marL="0">
+              <a:buNone/>
+            </a:pPr>
+            <a:r>
+              <a:rPr/>
+              <a:t>Bangladesh — same direction at smaller scale</a:t>
+            </a:r>
+          </a:p>
+        </p:txBody>
+      </p:sp>
+      <p:pic>
+        <p:nvPicPr>
+          <p:cNvPr descr="../../public-service-data-quality/generated/charts/psdq-choropleth-bgd-adm1.png" id="0" name="Picture 1"/>
+          <p:cNvPicPr>
+            <a:picLocks noGrp="1" noChangeAspect="1"/>
+          </p:cNvPicPr>
+          <p:nvPr/>
+        </p:nvPicPr>
+        <p:blipFill>
+          <a:blip r:embed="rId2"/>
+          <a:stretch>
+            <a:fillRect/>
+          </a:stretch>
+        </p:blipFill>
+        <p:spPr bwMode="auto">
           <a:xfrm>
-            <a:off x="722313" y="3305176"/>
-            <a:ext cx="7772400" cy="1021556"/>
+            <a:off x="2882900" y="1193800"/>
+            <a:ext cx="3365500" cy="3390900"/>
           </a:xfrm>
+          <a:prstGeom prst="rect">
+            <a:avLst/>
+          </a:prstGeom>
+          <a:noFill/>
+          <a:ln w="9525">
+            <a:noFill/>
+            <a:headEnd/>
+            <a:tailEnd/>
+          </a:ln>
         </p:spPr>
-        <p:txBody>
-          <a:bodyPr/>
-          <a:lstStyle/>
-          <a:p>
-            <a:pPr lvl="0" indent="0" marL="0">
-              <a:buNone/>
-            </a:pPr>
-            <a:r>
-              <a:rPr/>
-              <a:t>Robustness</a:t>
-            </a:r>
-          </a:p>
-        </p:txBody>
-      </p:sp>
+      </p:pic>
     </p:spTree>
   </p:cSld>
 </p:sld>
@@ -3276,12 +3304,12 @@
       </p:grpSpPr>
       <p:sp>
         <p:nvSpPr>
-          <p:cNvPr id="2" name="Title 1"/>
-          <p:cNvSpPr>
-            <a:spLocks noGrp="1"/>
-          </p:cNvSpPr>
-          <p:nvPr>
-            <p:ph type="title"/>
+          <p:cNvPr id="3" name="Content Placeholder 2"/>
+          <p:cNvSpPr>
+            <a:spLocks noGrp="1"/>
+          </p:cNvSpPr>
+          <p:nvPr>
+            <p:ph idx="1"/>
           </p:nvPr>
         </p:nvSpPr>
         <p:spPr/>
@@ -3294,84 +3322,31 @@
             </a:pPr>
             <a:r>
               <a:rPr/>
-              <a:t>The pattern survives every parameter at ±50%</a:t>
-            </a:r>
-          </a:p>
-        </p:txBody>
-      </p:sp>
-      <p:sp>
-        <p:nvSpPr>
-          <p:cNvPr id="3" name="Content Placeholder 2"/>
-          <p:cNvSpPr>
-            <a:spLocks noGrp="1"/>
-          </p:cNvSpPr>
-          <p:nvPr>
-            <p:ph idx="1"/>
-          </p:nvPr>
-        </p:nvSpPr>
-        <p:spPr/>
-        <p:txBody>
-          <a:bodyPr/>
-          <a:lstStyle/>
-          <a:p>
-            <a:pPr lvl="0" indent="0" marL="0">
-              <a:buNone/>
-            </a:pPr>
-            <a:r>
-              <a:rPr/>
-              <a:t>Per </a:t>
-            </a:r>
-            <a:r>
-              <a:rPr>
-                <a:latin typeface="Courier"/>
-              </a:rPr>
-              <a:t>CONSTITUTION.md</a:t>
-            </a:r>
-            <a:r>
-              <a:rPr/>
-              <a:t> §6.6, every arbitrary numeric was tested at ±50%:</a:t>
-            </a:r>
-          </a:p>
-          <a:p>
-            <a:pPr lvl="0"/>
+              <a:t>Dhaka </a:t>
+            </a:r>
             <a:r>
               <a:rPr b="1"/>
-              <a:t>Factype set cardinality</a:t>
-            </a:r>
-            <a:r>
-              <a:rPr/>
-              <a:t> (PHL 19→10 or 19→28; BGD keyword sets): ratio range 14.5%–17.3% (PHL), 11.6%–11.8% (BGD).</a:t>
-            </a:r>
-          </a:p>
-          <a:p>
-            <a:pPr lvl="0"/>
+              <a:t>20.1%</a:t>
+            </a:r>
+            <a:r>
+              <a:rPr/>
+              <a:t> → Barisal </a:t>
+            </a:r>
             <a:r>
               <a:rPr b="1"/>
-              <a:t>Rural-urban gradient quintile size</a:t>
-            </a:r>
-            <a:r>
-              <a:rPr/>
-              <a:t> (20%→10% or 20%→30%): gradient ranges 4.0×–7.0× (PHL), 2.18×–3.21× (BGD).</a:t>
-            </a:r>
-          </a:p>
-          <a:p>
-            <a:pPr lvl="0"/>
+              <a:t>6.2%</a:t>
+            </a:r>
+            <a:r>
+              <a:rPr/>
+              <a:t>. Different country, different registry, different volunteer community, </a:t>
+            </a:r>
             <a:r>
               <a:rPr b="1"/>
-              <a:t>Falsification threshold</a:t>
-            </a:r>
-            <a:r>
-              <a:rPr/>
-              <a:t> (±5%, ±10%, ±15%): zero of 17 PHL ADM1 units within tolerance at any threshold.</a:t>
-            </a:r>
-          </a:p>
-          <a:p>
-            <a:pPr lvl="0" indent="0" marL="0">
-              <a:buNone/>
-            </a:pPr>
-            <a:r>
-              <a:rPr b="1"/>
-              <a:t>No row flips the §8 decision rule in either country.</a:t>
+              <a:t>same direction</a:t>
+            </a:r>
+            <a:r>
+              <a:rPr/>
+              <a:t> of gradient.</a:t>
             </a:r>
           </a:p>
         </p:txBody>
@@ -3423,7 +3398,7 @@
             </a:pPr>
             <a:r>
               <a:rPr/>
-              <a:t>The granularity upgrade</a:t>
+              <a:t>Does the pattern hold when the rules change?</a:t>
             </a:r>
           </a:p>
         </p:txBody>
@@ -3470,98 +3445,84 @@
             </a:pPr>
             <a:r>
               <a:rPr/>
-              <a:t>Philippines — at city/municipality level (1,632 of 1,642)</a:t>
-            </a:r>
-          </a:p>
-        </p:txBody>
-      </p:sp>
-      <p:pic>
-        <p:nvPicPr>
-          <p:cNvPr descr="../../public-service-data-quality/generated/charts/psdq-choropleth-phl-adm3-poverty.png" id="0" name="Picture 1"/>
-          <p:cNvPicPr>
-            <a:picLocks noGrp="1" noChangeAspect="1"/>
-          </p:cNvPicPr>
-          <p:nvPr/>
-        </p:nvPicPr>
-        <p:blipFill>
-          <a:blip r:embed="rId2"/>
-          <a:stretch>
-            <a:fillRect/>
-          </a:stretch>
-        </p:blipFill>
-        <p:spPr bwMode="auto">
-          <a:xfrm>
-            <a:off x="3200400" y="1193800"/>
-            <a:ext cx="2743200" cy="2882900"/>
-          </a:xfrm>
-          <a:prstGeom prst="rect">
-            <a:avLst/>
-          </a:prstGeom>
-          <a:noFill/>
-          <a:ln w="9525">
-            <a:noFill/>
-            <a:headEnd/>
-            <a:tailEnd/>
-          </a:ln>
-        </p:spPr>
-      </p:pic>
-      <p:sp>
-        <p:nvSpPr>
-          <p:cNvPr id="1" name="TextBox 3"/>
-          <p:cNvSpPr txBox="1"/>
+              <a:t>The pattern survives every parameter at ±50%</a:t>
+            </a:r>
+          </a:p>
+        </p:txBody>
+      </p:sp>
+      <p:sp>
+        <p:nvSpPr>
+          <p:cNvPr id="3" name="Content Placeholder 2"/>
+          <p:cNvSpPr>
+            <a:spLocks noGrp="1"/>
+          </p:cNvSpPr>
           <p:nvPr>
             <p:ph idx="1"/>
           </p:nvPr>
         </p:nvSpPr>
-        <p:spPr>
-          <a:xfrm>
-            <a:off x="457200" y="4076700"/>
-            <a:ext cx="8229600" cy="508000"/>
-          </a:xfrm>
-          <a:prstGeom prst="rect">
-            <a:avLst/>
-          </a:prstGeom>
-          <a:noFill/>
-        </p:spPr>
-        <p:txBody>
-          <a:bodyPr/>
-          <a:lstStyle/>
-          <a:p>
-            <a:pPr lvl="0" indent="0" marL="0" algn="ctr">
+        <p:spPr/>
+        <p:txBody>
+          <a:bodyPr/>
+          <a:lstStyle/>
+          <a:p>
+            <a:pPr lvl="0" indent="0" marL="0">
               <a:buNone/>
             </a:pPr>
             <a:r>
               <a:rPr/>
-              <a:t>Philippines official 2023 poverty incidence at city/municipality level, joined to PSA/NAMRIA ADM3 polygons. Highest poverty concentrations in BARMM, the Cordillera, and parts of Eastern Visayas; lowest in NCR and Calabarzon. Ten polygons stay gray, marking source-missing rows that were not imputed.</a:t>
-            </a:r>
-          </a:p>
-        </p:txBody>
-      </p:sp>
-      <p:sp>
-        <p:nvSpPr>
-          <p:cNvPr id="3" name="Content Placeholder 2"/>
-          <p:cNvSpPr>
-            <a:spLocks noGrp="1"/>
-          </p:cNvSpPr>
-          <p:nvPr>
-            <p:ph idx="1"/>
-          </p:nvPr>
-        </p:nvSpPr>
-        <p:spPr/>
-        <p:txBody>
-          <a:bodyPr/>
-          <a:lstStyle/>
+              <a:t>Per </a:t>
+            </a:r>
+            <a:r>
+              <a:rPr>
+                <a:latin typeface="Courier"/>
+              </a:rPr>
+              <a:t>CONSTITUTION.md</a:t>
+            </a:r>
+            <a:r>
+              <a:rPr/>
+              <a:t> §6.6, every arbitrary numeric was tested at ±50%:</a:t>
+            </a:r>
+          </a:p>
+          <a:p>
+            <a:pPr lvl="0"/>
+            <a:r>
+              <a:rPr b="1"/>
+              <a:t>Which facility types count</a:t>
+            </a:r>
+            <a:r>
+              <a:rPr/>
+              <a:t> (PHL 19→10 or 19→28; BGD keyword sets): ratio range 14.5%–17.3% (PHL), 11.6%–11.8% (BGD).</a:t>
+            </a:r>
+          </a:p>
+          <a:p>
+            <a:pPr lvl="0"/>
+            <a:r>
+              <a:rPr b="1"/>
+              <a:t>Rural-urban gradient quintile size</a:t>
+            </a:r>
+            <a:r>
+              <a:rPr/>
+              <a:t> (20%→10% or 20%→30%): gradient ranges 4.0×–7.0× (PHL), 2.18×–3.21× (BGD).</a:t>
+            </a:r>
+          </a:p>
+          <a:p>
+            <a:pPr lvl="0"/>
+            <a:r>
+              <a:rPr b="1"/>
+              <a:t>How tight “agreement” is defined</a:t>
+            </a:r>
+            <a:r>
+              <a:rPr/>
+              <a:t> (±5%, ±10%, ±15%): zero of 17 PHL ADM1 units within tolerance at any threshold.</a:t>
+            </a:r>
+          </a:p>
           <a:p>
             <a:pPr lvl="0" indent="0" marL="0">
               <a:buNone/>
             </a:pPr>
             <a:r>
-              <a:rPr/>
-              <a:t>Owner-downloaded PSA 2023 SAE workbook + PSA OpenSTAT direct estimates. </a:t>
-            </a:r>
-            <a:r>
               <a:rPr b="1"/>
-              <a:t>10 polygons remain explicitly source-missing rather than imputed.</a:t>
+              <a:t>No row flips the §8 decision rule in either country.</a:t>
             </a:r>
           </a:p>
         </p:txBody>
@@ -3613,7 +3574,7 @@
             </a:pPr>
             <a:r>
               <a:rPr/>
-              <a:t>Why this matters for project preparation</a:t>
+              <a:t>What finer geography shows</a:t>
             </a:r>
           </a:p>
         </p:txBody>
@@ -3660,92 +3621,41 @@
             </a:pPr>
             <a:r>
               <a:rPr/>
-              <a:t>Project pipelines that read OSM alone misread service supply</a:t>
-            </a:r>
-          </a:p>
-        </p:txBody>
-      </p:sp>
-      <p:sp>
-        <p:nvSpPr>
-          <p:cNvPr id="3" name="Content Placeholder 2"/>
-          <p:cNvSpPr>
-            <a:spLocks noGrp="1"/>
-          </p:cNvSpPr>
-          <p:nvPr>
-            <p:ph idx="1"/>
-          </p:nvPr>
-        </p:nvSpPr>
-        <p:spPr/>
-        <p:txBody>
-          <a:bodyPr/>
-          <a:lstStyle/>
-          <a:p>
-            <a:pPr lvl="0" indent="0" marL="0">
-              <a:buNone/>
-            </a:pPr>
-            <a:r>
-              <a:rPr/>
-              <a:t>A planner reading the public map alone reads a different country than a planner reading the registry alone. The miscount is not uniform:</a:t>
-            </a:r>
-          </a:p>
-          <a:p>
-            <a:pPr lvl="0"/>
-            <a:r>
-              <a:rPr/>
-              <a:t>It is </a:t>
-            </a:r>
-            <a:r>
-              <a:rPr b="1"/>
-              <a:t>largest in rural and conflict-affected</a:t>
-            </a:r>
-            <a:r>
-              <a:rPr/>
-              <a:t> admin units.</a:t>
-            </a:r>
-          </a:p>
-          <a:p>
-            <a:pPr lvl="0"/>
-            <a:r>
-              <a:rPr/>
-              <a:t>It is </a:t>
-            </a:r>
-            <a:r>
-              <a:rPr b="1"/>
-              <a:t>smallest in capital regions</a:t>
-            </a:r>
-            <a:r>
-              <a:rPr/>
-              <a:t>.</a:t>
-            </a:r>
-          </a:p>
-          <a:p>
-            <a:pPr lvl="0" indent="0" marL="0">
-              <a:buNone/>
-            </a:pPr>
-            <a:r>
-              <a:rPr/>
-              <a:t>So OSM-only denominators systematically under-state facility density </a:t>
-            </a:r>
-            <a:r>
-              <a:rPr b="1"/>
-              <a:t>exactly where additional access most matters</a:t>
-            </a:r>
-            <a:r>
-              <a:rPr/>
-              <a:t>. This is a methodological finding about data infrastructure, not a quality judgment about countries.</a:t>
-            </a:r>
-          </a:p>
-          <a:p>
-            <a:pPr lvl="0" indent="0" marL="0">
-              <a:buNone/>
-            </a:pPr>
-            <a:r>
-              <a:rPr/>
-              <a:t>The same logic applies to schools, markets, and other public-service amenities visible in OpenStreetMap.</a:t>
-            </a:r>
-          </a:p>
-        </p:txBody>
-      </p:sp>
+              <a:t>Philippines — at city/municipality level (1,632 of 1,642)</a:t>
+            </a:r>
+          </a:p>
+        </p:txBody>
+      </p:sp>
+      <p:pic>
+        <p:nvPicPr>
+          <p:cNvPr descr="../../public-service-data-quality/generated/charts/psdq-choropleth-phl-adm3-poverty.png" id="0" name="Picture 1"/>
+          <p:cNvPicPr>
+            <a:picLocks noGrp="1" noChangeAspect="1"/>
+          </p:cNvPicPr>
+          <p:nvPr/>
+        </p:nvPicPr>
+        <p:blipFill>
+          <a:blip r:embed="rId2"/>
+          <a:stretch>
+            <a:fillRect/>
+          </a:stretch>
+        </p:blipFill>
+        <p:spPr bwMode="auto">
+          <a:xfrm>
+            <a:off x="2959100" y="1193800"/>
+            <a:ext cx="3238500" cy="3390900"/>
+          </a:xfrm>
+          <a:prstGeom prst="rect">
+            <a:avLst/>
+          </a:prstGeom>
+          <a:noFill/>
+          <a:ln w="9525">
+            <a:noFill/>
+            <a:headEnd/>
+            <a:tailEnd/>
+          </a:ln>
+        </p:spPr>
+      </p:pic>
     </p:spTree>
   </p:cSld>
 </p:sld>
@@ -3770,20 +3680,15 @@
       </p:grpSpPr>
       <p:sp>
         <p:nvSpPr>
-          <p:cNvPr id="2" name="Title 1"/>
-          <p:cNvSpPr>
-            <a:spLocks noGrp="1"/>
-          </p:cNvSpPr>
-          <p:nvPr>
-            <p:ph type="title"/>
-          </p:nvPr>
-        </p:nvSpPr>
-        <p:spPr>
-          <a:xfrm>
-            <a:off x="722313" y="3305176"/>
-            <a:ext cx="7772400" cy="1021556"/>
-          </a:xfrm>
-        </p:spPr>
+          <p:cNvPr id="3" name="Content Placeholder 2"/>
+          <p:cNvSpPr>
+            <a:spLocks noGrp="1"/>
+          </p:cNvSpPr>
+          <p:nvPr>
+            <p:ph idx="1"/>
+          </p:nvPr>
+        </p:nvSpPr>
+        <p:spPr/>
         <p:txBody>
           <a:bodyPr/>
           <a:lstStyle/>
@@ -3793,7 +3698,11 @@
             </a:pPr>
             <a:r>
               <a:rPr/>
-              <a:t>Honest limits</a:t>
+              <a:t>Owner-downloaded PSA 2023 SAE workbook + PSA OpenSTAT direct estimates. </a:t>
+            </a:r>
+            <a:r>
+              <a:rPr b="1"/>
+              <a:t>10 polygons remain explicitly source-missing rather than imputed.</a:t>
             </a:r>
           </a:p>
         </p:txBody>
@@ -3830,7 +3739,12 @@
             <p:ph type="title"/>
           </p:nvPr>
         </p:nvSpPr>
-        <p:spPr/>
+        <p:spPr>
+          <a:xfrm>
+            <a:off x="722313" y="3305176"/>
+            <a:ext cx="7772400" cy="1021556"/>
+          </a:xfrm>
+        </p:spPr>
         <p:txBody>
           <a:bodyPr/>
           <a:lstStyle/>
@@ -3840,83 +3754,7 @@
             </a:pPr>
             <a:r>
               <a:rPr/>
-              <a:t>What this deck does NOT claim</a:t>
-            </a:r>
-          </a:p>
-        </p:txBody>
-      </p:sp>
-      <p:sp>
-        <p:nvSpPr>
-          <p:cNvPr id="3" name="Content Placeholder 2"/>
-          <p:cNvSpPr>
-            <a:spLocks noGrp="1"/>
-          </p:cNvSpPr>
-          <p:nvPr>
-            <p:ph idx="1"/>
-          </p:nvPr>
-        </p:nvSpPr>
-        <p:spPr/>
-        <p:txBody>
-          <a:bodyPr/>
-          <a:lstStyle/>
-          <a:p>
-            <a:pPr lvl="0"/>
-            <a:r>
-              <a:rPr/>
-              <a:t>It does </a:t>
-            </a:r>
-            <a:r>
-              <a:rPr b="1"/>
-              <a:t>not</a:t>
-            </a:r>
-            <a:r>
-              <a:rPr/>
-              <a:t> claim OSM is wrong. Without a third independent source we cannot adjudicate which map is closer to ground truth.</a:t>
-            </a:r>
-          </a:p>
-          <a:p>
-            <a:pPr lvl="0"/>
-            <a:r>
-              <a:rPr/>
-              <a:t>It does </a:t>
-            </a:r>
-            <a:r>
-              <a:rPr b="1"/>
-              <a:t>not</a:t>
-            </a:r>
-            <a:r>
-              <a:rPr/>
-              <a:t> rank countries. Registry definitions differ; the cross-country ratios are not directly comparable. The within-country gradient is the comparable quantity.</a:t>
-            </a:r>
-          </a:p>
-          <a:p>
-            <a:pPr lvl="0"/>
-            <a:r>
-              <a:rPr/>
-              <a:t>It does </a:t>
-            </a:r>
-            <a:r>
-              <a:rPr b="1"/>
-              <a:t>not</a:t>
-            </a:r>
-            <a:r>
-              <a:rPr/>
-              <a:t> establish causal mechanisms. Volunteer behaviour, registry incentives, and conflict exposure all plausibly contribute in ways we have not separated.</a:t>
-            </a:r>
-          </a:p>
-          <a:p>
-            <a:pPr lvl="0"/>
-            <a:r>
-              <a:rPr/>
-              <a:t>It is </a:t>
-            </a:r>
-            <a:r>
-              <a:rPr b="1"/>
-              <a:t>not</a:t>
-            </a:r>
-            <a:r>
-              <a:rPr/>
-              <a:t> human-final. Under §18, this artifact is AI-attested. Owner attestation, line-by-line paper reading, and contact with external reviewers (Macharia, Zipf, PIDS, BIDS) are pre-conditions for a human-final upgrade.</a:t>
+              <a:t>Why this matters for planners</a:t>
             </a:r>
           </a:p>
         </p:txBody>
@@ -3953,12 +3791,7 @@
             <p:ph type="title"/>
           </p:nvPr>
         </p:nvSpPr>
-        <p:spPr>
-          <a:xfrm>
-            <a:off x="722313" y="3305176"/>
-            <a:ext cx="7772400" cy="1021556"/>
-          </a:xfrm>
-        </p:spPr>
+        <p:spPr/>
         <p:txBody>
           <a:bodyPr/>
           <a:lstStyle/>
@@ -3968,7 +3801,88 @@
             </a:pPr>
             <a:r>
               <a:rPr/>
-              <a:t>Reproducibility</a:t>
+              <a:t>Project pipelines that read OSM alone misread service supply</a:t>
+            </a:r>
+          </a:p>
+        </p:txBody>
+      </p:sp>
+      <p:sp>
+        <p:nvSpPr>
+          <p:cNvPr id="3" name="Content Placeholder 2"/>
+          <p:cNvSpPr>
+            <a:spLocks noGrp="1"/>
+          </p:cNvSpPr>
+          <p:nvPr>
+            <p:ph idx="1"/>
+          </p:nvPr>
+        </p:nvSpPr>
+        <p:spPr/>
+        <p:txBody>
+          <a:bodyPr/>
+          <a:lstStyle/>
+          <a:p>
+            <a:pPr lvl="0" indent="0" marL="0">
+              <a:buNone/>
+            </a:pPr>
+            <a:r>
+              <a:rPr/>
+              <a:t>A planner reading the public map alone reads a different country than a planner reading the registry alone. The miscount is not uniform:</a:t>
+            </a:r>
+          </a:p>
+          <a:p>
+            <a:pPr lvl="0"/>
+            <a:r>
+              <a:rPr/>
+              <a:t>It is </a:t>
+            </a:r>
+            <a:r>
+              <a:rPr b="1"/>
+              <a:t>largest in rural and conflict-affected</a:t>
+            </a:r>
+            <a:r>
+              <a:rPr/>
+              <a:t> admin units.</a:t>
+            </a:r>
+          </a:p>
+          <a:p>
+            <a:pPr lvl="0"/>
+            <a:r>
+              <a:rPr/>
+              <a:t>It is </a:t>
+            </a:r>
+            <a:r>
+              <a:rPr b="1"/>
+              <a:t>smallest in capital regions</a:t>
+            </a:r>
+            <a:r>
+              <a:rPr/>
+              <a:t>.</a:t>
+            </a:r>
+          </a:p>
+          <a:p>
+            <a:pPr lvl="0" indent="0" marL="0">
+              <a:buNone/>
+            </a:pPr>
+            <a:r>
+              <a:rPr/>
+              <a:t>So OSM-only denominators systematically under-state facility density </a:t>
+            </a:r>
+            <a:r>
+              <a:rPr b="1"/>
+              <a:t>exactly where additional access most matters</a:t>
+            </a:r>
+            <a:r>
+              <a:rPr/>
+              <a:t>. This is a measurement finding about data infrastructure, not a quality judgment about countries.</a:t>
+            </a:r>
+          </a:p>
+          <a:p>
+            <a:pPr lvl="0" indent="0" marL="0">
+              <a:buNone/>
+            </a:pPr>
+            <a:r>
+              <a:rPr/>
+              <a:t>The same logic applies to schools, markets, and other public-service amenities visible in OpenStreetMap.</a:t>
             </a:r>
           </a:p>
         </p:txBody>
@@ -4005,7 +3919,12 @@
             <p:ph type="title"/>
           </p:nvPr>
         </p:nvSpPr>
-        <p:spPr/>
+        <p:spPr>
+          <a:xfrm>
+            <a:off x="722313" y="3305176"/>
+            <a:ext cx="7772400" cy="1021556"/>
+          </a:xfrm>
+        </p:spPr>
         <p:txBody>
           <a:bodyPr/>
           <a:lstStyle/>
@@ -4015,166 +3934,7 @@
             </a:pPr>
             <a:r>
               <a:rPr/>
-              <a:t>Every number traces to a committed script</a:t>
-            </a:r>
-          </a:p>
-        </p:txBody>
-      </p:sp>
-      <p:sp>
-        <p:nvSpPr>
-          <p:cNvPr id="3" name="Content Placeholder 2"/>
-          <p:cNvSpPr>
-            <a:spLocks noGrp="1"/>
-          </p:cNvSpPr>
-          <p:nvPr>
-            <p:ph idx="1"/>
-          </p:nvPr>
-        </p:nvSpPr>
-        <p:spPr/>
-        <p:txBody>
-          <a:bodyPr/>
-          <a:lstStyle/>
-          <a:p>
-            <a:pPr lvl="0"/>
-            <a:r>
-              <a:rPr b="1"/>
-              <a:t>Working paper:</a:t>
-            </a:r>
-            <a:r>
-              <a:rPr/>
-              <a:t> </a:t>
-            </a:r>
-            <a:r>
-              <a:rPr>
-                <a:latin typeface="Courier"/>
-              </a:rPr>
-              <a:t>articles/measurement-gap-philippines-bangladesh.md</a:t>
-            </a:r>
-          </a:p>
-          <a:p>
-            <a:pPr lvl="0"/>
-            <a:r>
-              <a:rPr b="1"/>
-              <a:t>Brief:</a:t>
-            </a:r>
-            <a:r>
-              <a:rPr/>
-              <a:t> </a:t>
-            </a:r>
-            <a:r>
-              <a:rPr>
-                <a:latin typeface="Courier"/>
-              </a:rPr>
-              <a:t>articles/_brief/public-service-data-quality.md</a:t>
-            </a:r>
-          </a:p>
-          <a:p>
-            <a:pPr lvl="0"/>
-            <a:r>
-              <a:rPr b="1"/>
-              <a:t>Pipeline:</a:t>
-            </a:r>
-            <a:r>
-              <a:rPr/>
-              <a:t> </a:t>
-            </a:r>
-            <a:r>
-              <a:rPr>
-                <a:latin typeface="Courier"/>
-              </a:rPr>
-              <a:t>public-service-data-quality/scripts/</a:t>
-            </a:r>
-          </a:p>
-          <a:p>
-            <a:pPr lvl="0"/>
-            <a:r>
-              <a:rPr b="1"/>
-              <a:t>Sensitivity:</a:t>
-            </a:r>
-            <a:r>
-              <a:rPr/>
-              <a:t> </a:t>
-            </a:r>
-            <a:r>
-              <a:rPr>
-                <a:latin typeface="Courier"/>
-              </a:rPr>
-              <a:t>public-service-data-quality/sensitivity.md</a:t>
-            </a:r>
-          </a:p>
-          <a:p>
-            <a:pPr lvl="0"/>
-            <a:r>
-              <a:rPr b="1"/>
-              <a:t>Limitations:</a:t>
-            </a:r>
-            <a:r>
-              <a:rPr/>
-              <a:t> </a:t>
-            </a:r>
-            <a:r>
-              <a:rPr>
-                <a:latin typeface="Courier"/>
-              </a:rPr>
-              <a:t>public-service-data-quality/limitations.md</a:t>
-            </a:r>
-          </a:p>
-          <a:p>
-            <a:pPr lvl="0"/>
-            <a:r>
-              <a:rPr b="1"/>
-              <a:t>Evidence packet:</a:t>
-            </a:r>
-            <a:r>
-              <a:rPr/>
-              <a:t> </a:t>
-            </a:r>
-            <a:r>
-              <a:rPr>
-                <a:latin typeface="Courier"/>
-              </a:rPr>
-              <a:t>/program/public-service-data-quality/evidence</a:t>
-            </a:r>
-          </a:p>
-          <a:p>
-            <a:pPr lvl="0"/>
-            <a:r>
-              <a:rPr b="1"/>
-              <a:t>Charts:</a:t>
-            </a:r>
-            <a:r>
-              <a:rPr/>
-              <a:t> rendered by </a:t>
-            </a:r>
-            <a:r>
-              <a:rPr>
-                <a:latin typeface="Courier"/>
-              </a:rPr>
-              <a:t>build-choropleth.py</a:t>
-            </a:r>
-            <a:r>
-              <a:rPr/>
-              <a:t> from </a:t>
-            </a:r>
-            <a:r>
-              <a:rPr>
-                <a:latin typeface="Courier"/>
-              </a:rPr>
-              <a:t>generated/public-service-data-quality-{PHL,BGD}.csv</a:t>
-            </a:r>
-            <a:r>
-              <a:rPr/>
-              <a:t> and </a:t>
-            </a:r>
-            <a:r>
-              <a:rPr>
-                <a:latin typeface="Courier"/>
-              </a:rPr>
-              <a:t>generated/psdq-phl-admin3-poverty-context.csv</a:t>
-            </a:r>
-            <a:r>
-              <a:rPr/>
-              <a:t>.</a:t>
+              <a:t>What this deck does not claim</a:t>
             </a:r>
           </a:p>
         </p:txBody>
@@ -4226,7 +3986,7 @@
             </a:pPr>
             <a:r>
               <a:rPr/>
-              <a:t>The question</a:t>
+              <a:t>Why facility counts disagree</a:t>
             </a:r>
           </a:p>
         </p:txBody>
@@ -4273,6 +4033,387 @@
             </a:pPr>
             <a:r>
               <a:rPr/>
+              <a:t>Limits a careful reader should keep in view</a:t>
+            </a:r>
+          </a:p>
+        </p:txBody>
+      </p:sp>
+      <p:sp>
+        <p:nvSpPr>
+          <p:cNvPr id="3" name="Content Placeholder 2"/>
+          <p:cNvSpPr>
+            <a:spLocks noGrp="1"/>
+          </p:cNvSpPr>
+          <p:nvPr>
+            <p:ph idx="1"/>
+          </p:nvPr>
+        </p:nvSpPr>
+        <p:spPr/>
+        <p:txBody>
+          <a:bodyPr/>
+          <a:lstStyle/>
+          <a:p>
+            <a:pPr lvl="0"/>
+            <a:r>
+              <a:rPr/>
+              <a:t>It does </a:t>
+            </a:r>
+            <a:r>
+              <a:rPr b="1"/>
+              <a:t>not</a:t>
+            </a:r>
+            <a:r>
+              <a:rPr/>
+              <a:t> claim OSM is wrong. Without a third independent source we cannot adjudicate which map is closer to ground truth.</a:t>
+            </a:r>
+          </a:p>
+          <a:p>
+            <a:pPr lvl="0"/>
+            <a:r>
+              <a:rPr/>
+              <a:t>It does </a:t>
+            </a:r>
+            <a:r>
+              <a:rPr b="1"/>
+              <a:t>not</a:t>
+            </a:r>
+            <a:r>
+              <a:rPr/>
+              <a:t> rank countries. Registry definitions differ; the cross-country ratios are not directly comparable. The within-country gradient is the comparable quantity.</a:t>
+            </a:r>
+          </a:p>
+          <a:p>
+            <a:pPr lvl="0"/>
+            <a:r>
+              <a:rPr/>
+              <a:t>It does </a:t>
+            </a:r>
+            <a:r>
+              <a:rPr b="1"/>
+              <a:t>not</a:t>
+            </a:r>
+            <a:r>
+              <a:rPr/>
+              <a:t> establish causal mechanisms. Volunteer behaviour, registry incentives, and conflict exposure all plausibly contribute in ways we have not separated.</a:t>
+            </a:r>
+          </a:p>
+          <a:p>
+            <a:pPr lvl="0"/>
+            <a:r>
+              <a:rPr/>
+              <a:t>It is </a:t>
+            </a:r>
+            <a:r>
+              <a:rPr b="1"/>
+              <a:t>not</a:t>
+            </a:r>
+            <a:r>
+              <a:rPr/>
+              <a:t> human-final. Under §18, this artifact is AI-attested. Owner attestation, line-by-line paper reading, and contact with external reviewers (Macharia, Zipf, PIDS, BIDS) are pre-conditions for a human-final upgrade.</a:t>
+            </a:r>
+          </a:p>
+        </p:txBody>
+      </p:sp>
+    </p:spTree>
+  </p:cSld>
+</p:sld>
+</file>
+
+<file path=ppt/slides/slide21.xml><?xml version="1.0" encoding="utf-8"?>
+<p:sld xmlns:a="http://schemas.openxmlformats.org/drawingml/2006/main" xmlns:r="http://schemas.openxmlformats.org/officeDocument/2006/relationships" xmlns:p="http://schemas.openxmlformats.org/presentationml/2006/main">
+  <p:cSld>
+    <p:spTree>
+      <p:nvGrpSpPr>
+        <p:cNvPr id="1" name=""/>
+        <p:cNvGrpSpPr/>
+        <p:nvPr/>
+      </p:nvGrpSpPr>
+      <p:grpSpPr>
+        <a:xfrm>
+          <a:off x="0" y="0"/>
+          <a:ext cx="0" cy="0"/>
+          <a:chOff x="0" y="0"/>
+          <a:chExt cx="0" cy="0"/>
+        </a:xfrm>
+      </p:grpSpPr>
+      <p:sp>
+        <p:nvSpPr>
+          <p:cNvPr id="2" name="Title 1"/>
+          <p:cNvSpPr>
+            <a:spLocks noGrp="1"/>
+          </p:cNvSpPr>
+          <p:nvPr>
+            <p:ph type="title"/>
+          </p:nvPr>
+        </p:nvSpPr>
+        <p:spPr>
+          <a:xfrm>
+            <a:off x="722313" y="3305176"/>
+            <a:ext cx="7772400" cy="1021556"/>
+          </a:xfrm>
+        </p:spPr>
+        <p:txBody>
+          <a:bodyPr/>
+          <a:lstStyle/>
+          <a:p>
+            <a:pPr lvl="0" indent="0" marL="0">
+              <a:buNone/>
+            </a:pPr>
+            <a:r>
+              <a:rPr/>
+              <a:t>Where the numbers come from</a:t>
+            </a:r>
+          </a:p>
+        </p:txBody>
+      </p:sp>
+    </p:spTree>
+  </p:cSld>
+</p:sld>
+</file>
+
+<file path=ppt/slides/slide22.xml><?xml version="1.0" encoding="utf-8"?>
+<p:sld xmlns:a="http://schemas.openxmlformats.org/drawingml/2006/main" xmlns:r="http://schemas.openxmlformats.org/officeDocument/2006/relationships" xmlns:p="http://schemas.openxmlformats.org/presentationml/2006/main">
+  <p:cSld>
+    <p:spTree>
+      <p:nvGrpSpPr>
+        <p:cNvPr id="1" name=""/>
+        <p:cNvGrpSpPr/>
+        <p:nvPr/>
+      </p:nvGrpSpPr>
+      <p:grpSpPr>
+        <a:xfrm>
+          <a:off x="0" y="0"/>
+          <a:ext cx="0" cy="0"/>
+          <a:chOff x="0" y="0"/>
+          <a:chExt cx="0" cy="0"/>
+        </a:xfrm>
+      </p:grpSpPr>
+      <p:sp>
+        <p:nvSpPr>
+          <p:cNvPr id="2" name="Title 1"/>
+          <p:cNvSpPr>
+            <a:spLocks noGrp="1"/>
+          </p:cNvSpPr>
+          <p:nvPr>
+            <p:ph type="title"/>
+          </p:nvPr>
+        </p:nvSpPr>
+        <p:spPr/>
+        <p:txBody>
+          <a:bodyPr/>
+          <a:lstStyle/>
+          <a:p>
+            <a:pPr lvl="0" indent="0" marL="0">
+              <a:buNone/>
+            </a:pPr>
+            <a:r>
+              <a:rPr/>
+              <a:t>Every number traces to a committed script</a:t>
+            </a:r>
+          </a:p>
+        </p:txBody>
+      </p:sp>
+      <p:sp>
+        <p:nvSpPr>
+          <p:cNvPr id="3" name="Content Placeholder 2"/>
+          <p:cNvSpPr>
+            <a:spLocks noGrp="1"/>
+          </p:cNvSpPr>
+          <p:nvPr>
+            <p:ph idx="1"/>
+          </p:nvPr>
+        </p:nvSpPr>
+        <p:spPr/>
+        <p:txBody>
+          <a:bodyPr/>
+          <a:lstStyle/>
+          <a:p>
+            <a:pPr lvl="0"/>
+            <a:r>
+              <a:rPr b="1"/>
+              <a:t>Working paper:</a:t>
+            </a:r>
+            <a:r>
+              <a:rPr/>
+              <a:t> </a:t>
+            </a:r>
+            <a:r>
+              <a:rPr>
+                <a:latin typeface="Courier"/>
+              </a:rPr>
+              <a:t>articles/measurement-gap-philippines-bangladesh.md</a:t>
+            </a:r>
+          </a:p>
+          <a:p>
+            <a:pPr lvl="0"/>
+            <a:r>
+              <a:rPr b="1"/>
+              <a:t>Brief:</a:t>
+            </a:r>
+            <a:r>
+              <a:rPr/>
+              <a:t> </a:t>
+            </a:r>
+            <a:r>
+              <a:rPr>
+                <a:latin typeface="Courier"/>
+              </a:rPr>
+              <a:t>articles/_brief/public-service-data-quality.md</a:t>
+            </a:r>
+          </a:p>
+          <a:p>
+            <a:pPr lvl="0"/>
+            <a:r>
+              <a:rPr b="1"/>
+              <a:t>Pipeline:</a:t>
+            </a:r>
+            <a:r>
+              <a:rPr/>
+              <a:t> </a:t>
+            </a:r>
+            <a:r>
+              <a:rPr>
+                <a:latin typeface="Courier"/>
+              </a:rPr>
+              <a:t>public-service-data-quality/scripts/</a:t>
+            </a:r>
+          </a:p>
+          <a:p>
+            <a:pPr lvl="0"/>
+            <a:r>
+              <a:rPr b="1"/>
+              <a:t>Sensitivity:</a:t>
+            </a:r>
+            <a:r>
+              <a:rPr/>
+              <a:t> </a:t>
+            </a:r>
+            <a:r>
+              <a:rPr>
+                <a:latin typeface="Courier"/>
+              </a:rPr>
+              <a:t>public-service-data-quality/sensitivity.md</a:t>
+            </a:r>
+          </a:p>
+          <a:p>
+            <a:pPr lvl="0"/>
+            <a:r>
+              <a:rPr b="1"/>
+              <a:t>Limitations:</a:t>
+            </a:r>
+            <a:r>
+              <a:rPr/>
+              <a:t> </a:t>
+            </a:r>
+            <a:r>
+              <a:rPr>
+                <a:latin typeface="Courier"/>
+              </a:rPr>
+              <a:t>public-service-data-quality/limitations.md</a:t>
+            </a:r>
+          </a:p>
+          <a:p>
+            <a:pPr lvl="0"/>
+            <a:r>
+              <a:rPr b="1"/>
+              <a:t>Evidence packet:</a:t>
+            </a:r>
+            <a:r>
+              <a:rPr/>
+              <a:t> </a:t>
+            </a:r>
+            <a:r>
+              <a:rPr>
+                <a:latin typeface="Courier"/>
+              </a:rPr>
+              <a:t>/program/public-service-data-quality/evidence</a:t>
+            </a:r>
+          </a:p>
+          <a:p>
+            <a:pPr lvl="0"/>
+            <a:r>
+              <a:rPr b="1"/>
+              <a:t>Charts:</a:t>
+            </a:r>
+            <a:r>
+              <a:rPr/>
+              <a:t> rendered by </a:t>
+            </a:r>
+            <a:r>
+              <a:rPr>
+                <a:latin typeface="Courier"/>
+              </a:rPr>
+              <a:t>build-choropleth.py</a:t>
+            </a:r>
+            <a:r>
+              <a:rPr/>
+              <a:t> from </a:t>
+            </a:r>
+            <a:r>
+              <a:rPr>
+                <a:latin typeface="Courier"/>
+              </a:rPr>
+              <a:t>generated/public-service-data-quality-{PHL,BGD}.csv</a:t>
+            </a:r>
+            <a:r>
+              <a:rPr/>
+              <a:t> and </a:t>
+            </a:r>
+            <a:r>
+              <a:rPr>
+                <a:latin typeface="Courier"/>
+              </a:rPr>
+              <a:t>generated/psdq-phl-admin3-poverty-context.csv</a:t>
+            </a:r>
+            <a:r>
+              <a:rPr/>
+              <a:t>.</a:t>
+            </a:r>
+          </a:p>
+        </p:txBody>
+      </p:sp>
+    </p:spTree>
+  </p:cSld>
+</p:sld>
+</file>
+
+<file path=ppt/slides/slide23.xml><?xml version="1.0" encoding="utf-8"?>
+<p:sld xmlns:a="http://schemas.openxmlformats.org/drawingml/2006/main" xmlns:r="http://schemas.openxmlformats.org/officeDocument/2006/relationships" xmlns:p="http://schemas.openxmlformats.org/presentationml/2006/main">
+  <p:cSld>
+    <p:spTree>
+      <p:nvGrpSpPr>
+        <p:cNvPr id="1" name=""/>
+        <p:cNvGrpSpPr/>
+        <p:nvPr/>
+      </p:nvGrpSpPr>
+      <p:grpSpPr>
+        <a:xfrm>
+          <a:off x="0" y="0"/>
+          <a:ext cx="0" cy="0"/>
+          <a:chOff x="0" y="0"/>
+          <a:chExt cx="0" cy="0"/>
+        </a:xfrm>
+      </p:grpSpPr>
+      <p:sp>
+        <p:nvSpPr>
+          <p:cNvPr id="2" name="Title 1"/>
+          <p:cNvSpPr>
+            <a:spLocks noGrp="1"/>
+          </p:cNvSpPr>
+          <p:nvPr>
+            <p:ph type="title"/>
+          </p:nvPr>
+        </p:nvSpPr>
+        <p:spPr/>
+        <p:txBody>
+          <a:bodyPr/>
+          <a:lstStyle/>
+          <a:p>
+            <a:pPr lvl="0" indent="0" marL="0">
+              <a:buNone/>
+            </a:pPr>
+            <a:r>
+              <a:rPr/>
               <a:t>Attestation chain</a:t>
             </a:r>
           </a:p>
@@ -4474,7 +4615,7 @@
             </a:r>
             <a:r>
               <a:rPr/>
-              <a:t> — volunteer-edited, open, frequently used in spatial-analysis pipelines.</a:t>
+              <a:t> — volunteer-edited, open, and often fed into spatial analysis.</a:t>
             </a:r>
           </a:p>
           <a:p>
@@ -4485,7 +4626,7 @@
             </a:r>
             <a:r>
               <a:rPr/>
-              <a:t> — administrative record kept by the health ministry, used for licensing and reporting.</a:t>
+              <a:t> — the health ministry’s administrative record for licensing and reporting.</a:t>
             </a:r>
           </a:p>
           <a:p>
@@ -4511,7 +4652,7 @@
             </a:pPr>
             <a:r>
               <a:rPr/>
-              <a:t>This deck reports the first methodologically careful version of that finding for two ADB developing member economies. It carries an </a:t>
+              <a:t>This deck is the first careful version of that finding for two ADB developing member economies. It carries an </a:t>
             </a:r>
             <a:r>
               <a:rPr>
@@ -4583,7 +4724,7 @@
             </a:pPr>
             <a:r>
               <a:rPr/>
-              <a:t>The headline</a:t>
+              <a:t>How much of the registry OSM captures</a:t>
             </a:r>
           </a:p>
         </p:txBody>
@@ -4996,7 +5137,7 @@
             </a:pPr>
             <a:r>
               <a:rPr/>
-              <a:t>The pattern</a:t>
+              <a:t>Where the gap is largest</a:t>
             </a:r>
           </a:p>
         </p:txBody>
@@ -5064,8 +5205,8 @@
         </p:blipFill>
         <p:spPr bwMode="auto">
           <a:xfrm>
-            <a:off x="3162300" y="1193800"/>
-            <a:ext cx="2832100" cy="2882900"/>
+            <a:off x="2908300" y="1193800"/>
+            <a:ext cx="3327400" cy="3390900"/>
           </a:xfrm>
           <a:prstGeom prst="rect">
             <a:avLst/>
@@ -5078,79 +5219,6 @@
           </a:ln>
         </p:spPr>
       </p:pic>
-      <p:sp>
-        <p:nvSpPr>
-          <p:cNvPr id="1" name="TextBox 3"/>
-          <p:cNvSpPr txBox="1"/>
-          <p:nvPr>
-            <p:ph idx="1"/>
-          </p:nvPr>
-        </p:nvSpPr>
-        <p:spPr>
-          <a:xfrm>
-            <a:off x="457200" y="4076700"/>
-            <a:ext cx="8229600" cy="508000"/>
-          </a:xfrm>
-          <a:prstGeom prst="rect">
-            <a:avLst/>
-          </a:prstGeom>
-          <a:noFill/>
-        </p:spPr>
-        <p:txBody>
-          <a:bodyPr/>
-          <a:lstStyle/>
-          <a:p>
-            <a:pPr lvl="0" indent="0" marL="0" algn="ctr">
-              <a:buNone/>
-            </a:pPr>
-            <a:r>
-              <a:rPr/>
-              <a:t>Philippines — OSM ÷ NHFR clinical-tier ratio per ADM1 region. NCR (top of the country) shows the highest ratio (about 0.6); BARMM and the rural Mindanao regions show the lowest (about 0.07). 17 regions total.</a:t>
-            </a:r>
-          </a:p>
-        </p:txBody>
-      </p:sp>
-      <p:sp>
-        <p:nvSpPr>
-          <p:cNvPr id="3" name="Content Placeholder 2"/>
-          <p:cNvSpPr>
-            <a:spLocks noGrp="1"/>
-          </p:cNvSpPr>
-          <p:nvPr>
-            <p:ph idx="1"/>
-          </p:nvPr>
-        </p:nvSpPr>
-        <p:spPr/>
-        <p:txBody>
-          <a:bodyPr/>
-          <a:lstStyle/>
-          <a:p>
-            <a:pPr lvl="0" indent="0" marL="0">
-              <a:buNone/>
-            </a:pPr>
-            <a:r>
-              <a:rPr/>
-              <a:t>NCR </a:t>
-            </a:r>
-            <a:r>
-              <a:rPr b="1"/>
-              <a:t>63.5%</a:t>
-            </a:r>
-            <a:r>
-              <a:rPr/>
-              <a:t> → BARMM </a:t>
-            </a:r>
-            <a:r>
-              <a:rPr b="1"/>
-              <a:t>6.5%</a:t>
-            </a:r>
-            <a:r>
-              <a:rPr/>
-              <a:t>. Every region disagrees with OSM by more than ±10%.</a:t>
-            </a:r>
-          </a:p>
-        </p:txBody>
-      </p:sp>
     </p:spTree>
   </p:cSld>
 </p:sld>
@@ -5175,12 +5243,12 @@
       </p:grpSpPr>
       <p:sp>
         <p:nvSpPr>
-          <p:cNvPr id="2" name="Title 1"/>
-          <p:cNvSpPr>
-            <a:spLocks noGrp="1"/>
-          </p:cNvSpPr>
-          <p:nvPr>
-            <p:ph type="title"/>
+          <p:cNvPr id="3" name="Content Placeholder 2"/>
+          <p:cNvSpPr>
+            <a:spLocks noGrp="1"/>
+          </p:cNvSpPr>
+          <p:nvPr>
+            <p:ph idx="1"/>
           </p:nvPr>
         </p:nvSpPr>
         <p:spPr/>
@@ -5193,118 +5261,23 @@
             </a:pPr>
             <a:r>
               <a:rPr/>
-              <a:t>Bangladesh — same direction at smaller scale</a:t>
-            </a:r>
-          </a:p>
-        </p:txBody>
-      </p:sp>
-      <p:pic>
-        <p:nvPicPr>
-          <p:cNvPr descr="../../public-service-data-quality/generated/charts/psdq-choropleth-bgd-adm1.png" id="0" name="Picture 1"/>
-          <p:cNvPicPr>
-            <a:picLocks noGrp="1" noChangeAspect="1"/>
-          </p:cNvPicPr>
-          <p:nvPr/>
-        </p:nvPicPr>
-        <p:blipFill>
-          <a:blip r:embed="rId2"/>
-          <a:stretch>
-            <a:fillRect/>
-          </a:stretch>
-        </p:blipFill>
-        <p:spPr bwMode="auto">
-          <a:xfrm>
-            <a:off x="3136900" y="1193800"/>
-            <a:ext cx="2857500" cy="2882900"/>
-          </a:xfrm>
-          <a:prstGeom prst="rect">
-            <a:avLst/>
-          </a:prstGeom>
-          <a:noFill/>
-          <a:ln w="9525">
-            <a:noFill/>
-            <a:headEnd/>
-            <a:tailEnd/>
-          </a:ln>
-        </p:spPr>
-      </p:pic>
-      <p:sp>
-        <p:nvSpPr>
-          <p:cNvPr id="1" name="TextBox 3"/>
-          <p:cNvSpPr txBox="1"/>
-          <p:nvPr>
-            <p:ph idx="1"/>
-          </p:nvPr>
-        </p:nvSpPr>
-        <p:spPr>
-          <a:xfrm>
-            <a:off x="457200" y="4076700"/>
-            <a:ext cx="8229600" cy="508000"/>
-          </a:xfrm>
-          <a:prstGeom prst="rect">
-            <a:avLst/>
-          </a:prstGeom>
-          <a:noFill/>
-        </p:spPr>
-        <p:txBody>
-          <a:bodyPr/>
-          <a:lstStyle/>
-          <a:p>
-            <a:pPr lvl="0" indent="0" marL="0" algn="ctr">
-              <a:buNone/>
-            </a:pPr>
-            <a:r>
-              <a:rPr/>
-              <a:t>Bangladesh — OSM ÷ DGHS clinical-tier ratio per ADM1 division. Dhaka (centre) shows the highest ratio (about 0.20); Sylhet and Barisal show the lowest (about 0.06 to 0.08).</a:t>
-            </a:r>
-          </a:p>
-        </p:txBody>
-      </p:sp>
-      <p:sp>
-        <p:nvSpPr>
-          <p:cNvPr id="3" name="Content Placeholder 2"/>
-          <p:cNvSpPr>
-            <a:spLocks noGrp="1"/>
-          </p:cNvSpPr>
-          <p:nvPr>
-            <p:ph idx="1"/>
-          </p:nvPr>
-        </p:nvSpPr>
-        <p:spPr/>
-        <p:txBody>
-          <a:bodyPr/>
-          <a:lstStyle/>
-          <a:p>
-            <a:pPr lvl="0" indent="0" marL="0">
-              <a:buNone/>
-            </a:pPr>
-            <a:r>
-              <a:rPr/>
-              <a:t>Dhaka </a:t>
+              <a:t>NCR </a:t>
             </a:r>
             <a:r>
               <a:rPr b="1"/>
-              <a:t>20.1%</a:t>
-            </a:r>
-            <a:r>
-              <a:rPr/>
-              <a:t> → Barisal </a:t>
+              <a:t>63.5%</a:t>
+            </a:r>
+            <a:r>
+              <a:rPr/>
+              <a:t> → BARMM </a:t>
             </a:r>
             <a:r>
               <a:rPr b="1"/>
-              <a:t>6.2%</a:t>
-            </a:r>
-            <a:r>
-              <a:rPr/>
-              <a:t>. Different country, different registry, different volunteer community, </a:t>
-            </a:r>
-            <a:r>
-              <a:rPr b="1"/>
-              <a:t>same direction</a:t>
-            </a:r>
-            <a:r>
-              <a:rPr/>
-              <a:t> of gradient.</a:t>
+              <a:t>6.5%</a:t>
+            </a:r>
+            <a:r>
+              <a:rPr/>
+              <a:t>. Every region disagrees with OSM by more than ±10%.</a:t>
             </a:r>
           </a:p>
         </p:txBody>
